--- a/構成図.pptx
+++ b/構成図.pptx
@@ -173,111 +173,199 @@
 </p:presentation>
 </file>
 
-<file path=ppt/revisionInfo.xml><?xml version="1.0" encoding="utf-8"?>
-<p1510:revInfo xmlns:a="http://schemas.openxmlformats.org/drawingml/2006/main" xmlns:r="http://schemas.openxmlformats.org/officeDocument/2006/relationships" xmlns:p1510="http://schemas.microsoft.com/office/powerpoint/2015/10/main">
-  <p1510:revLst>
-    <p1510:client id="{99D799A5-0510-49E0-A558-969352B1C8DC}" v="3" dt="2026-06-12T04:27:34.483"/>
-  </p1510:revLst>
-</p1510:revInfo>
-</file>
-
 <file path=ppt/changesInfos/changesInfo1.xml><?xml version="1.0" encoding="utf-8"?>
 <pc:chgInfo xmlns:a="http://schemas.openxmlformats.org/drawingml/2006/main" xmlns:r="http://schemas.openxmlformats.org/officeDocument/2006/relationships" xmlns:ac="http://schemas.microsoft.com/office/drawing/2013/main/command" xmlns:pc="http://schemas.microsoft.com/office/powerpoint/2013/main/command">
   <pc:docChgLst>
     <pc:chgData name="城谷 匠" userId="afbae57c-d4ca-4e58-bc9a-6f765e208d89" providerId="ADAL" clId="{FD963559-32B2-43B7-8F97-A1E47AC731FA}"/>
     <pc:docChg chg="undo custSel modSld delMainMaster">
-      <pc:chgData name="城谷 匠" userId="afbae57c-d4ca-4e58-bc9a-6f765e208d89" providerId="ADAL" clId="{FD963559-32B2-43B7-8F97-A1E47AC731FA}" dt="2026-06-12T04:27:37.875" v="15" actId="208"/>
+      <pc:chgData name="城谷 匠" userId="afbae57c-d4ca-4e58-bc9a-6f765e208d89" providerId="ADAL" clId="{FD963559-32B2-43B7-8F97-A1E47AC731FA}" dt="2026-10-05T06:23:07.830" v="54" actId="1076"/>
       <pc:docMkLst>
         <pc:docMk/>
       </pc:docMkLst>
       <pc:sldChg chg="addSp delSp modSp mod">
-        <pc:chgData name="城谷 匠" userId="afbae57c-d4ca-4e58-bc9a-6f765e208d89" providerId="ADAL" clId="{FD963559-32B2-43B7-8F97-A1E47AC731FA}" dt="2026-06-12T04:27:37.875" v="15" actId="208"/>
+        <pc:chgData name="城谷 匠" userId="afbae57c-d4ca-4e58-bc9a-6f765e208d89" providerId="ADAL" clId="{FD963559-32B2-43B7-8F97-A1E47AC731FA}" dt="2026-10-05T06:23:07.830" v="54" actId="1076"/>
         <pc:sldMkLst>
           <pc:docMk/>
           <pc:sldMk cId="1156372304" sldId="256"/>
         </pc:sldMkLst>
-        <pc:spChg chg="mod topLvl">
-          <ac:chgData name="城谷 匠" userId="afbae57c-d4ca-4e58-bc9a-6f765e208d89" providerId="ADAL" clId="{FD963559-32B2-43B7-8F97-A1E47AC731FA}" dt="2026-06-12T04:27:18.499" v="11" actId="165"/>
+        <pc:spChg chg="del mod topLvl">
+          <ac:chgData name="城谷 匠" userId="afbae57c-d4ca-4e58-bc9a-6f765e208d89" providerId="ADAL" clId="{FD963559-32B2-43B7-8F97-A1E47AC731FA}" dt="2026-10-05T06:19:24.975" v="16" actId="478"/>
           <ac:spMkLst>
             <pc:docMk/>
             <pc:sldMk cId="1156372304" sldId="256"/>
             <ac:spMk id="17" creationId="{2E87E127-501D-495F-6FC0-34B4F7E95A68}"/>
           </ac:spMkLst>
         </pc:spChg>
-        <pc:spChg chg="mod topLvl">
-          <ac:chgData name="城谷 匠" userId="afbae57c-d4ca-4e58-bc9a-6f765e208d89" providerId="ADAL" clId="{FD963559-32B2-43B7-8F97-A1E47AC731FA}" dt="2026-06-12T04:27:18.499" v="11" actId="165"/>
+        <pc:spChg chg="mod">
+          <ac:chgData name="城谷 匠" userId="afbae57c-d4ca-4e58-bc9a-6f765e208d89" providerId="ADAL" clId="{FD963559-32B2-43B7-8F97-A1E47AC731FA}" dt="2026-10-05T06:22:03.131" v="44" actId="1076"/>
           <ac:spMkLst>
             <pc:docMk/>
             <pc:sldMk cId="1156372304" sldId="256"/>
             <ac:spMk id="18" creationId="{08AD9044-79AA-2BF3-A59C-139D0BB2000A}"/>
           </ac:spMkLst>
         </pc:spChg>
-        <pc:spChg chg="mod topLvl">
-          <ac:chgData name="城谷 匠" userId="afbae57c-d4ca-4e58-bc9a-6f765e208d89" providerId="ADAL" clId="{FD963559-32B2-43B7-8F97-A1E47AC731FA}" dt="2026-06-12T04:27:18.499" v="11" actId="165"/>
+        <pc:spChg chg="del">
+          <ac:chgData name="城谷 匠" userId="afbae57c-d4ca-4e58-bc9a-6f765e208d89" providerId="ADAL" clId="{FD963559-32B2-43B7-8F97-A1E47AC731FA}" dt="2026-10-05T06:19:54.210" v="25" actId="478"/>
           <ac:spMkLst>
             <pc:docMk/>
             <pc:sldMk cId="1156372304" sldId="256"/>
             <ac:spMk id="20" creationId="{F04A8B08-D24B-99DB-FEEB-E5098440177B}"/>
           </ac:spMkLst>
         </pc:spChg>
-        <pc:spChg chg="mod topLvl">
-          <ac:chgData name="城谷 匠" userId="afbae57c-d4ca-4e58-bc9a-6f765e208d89" providerId="ADAL" clId="{FD963559-32B2-43B7-8F97-A1E47AC731FA}" dt="2026-06-12T04:27:18.499" v="11" actId="165"/>
+        <pc:spChg chg="del">
+          <ac:chgData name="城谷 匠" userId="afbae57c-d4ca-4e58-bc9a-6f765e208d89" providerId="ADAL" clId="{FD963559-32B2-43B7-8F97-A1E47AC731FA}" dt="2026-10-05T06:19:56.005" v="26" actId="478"/>
           <ac:spMkLst>
             <pc:docMk/>
             <pc:sldMk cId="1156372304" sldId="256"/>
             <ac:spMk id="21" creationId="{4BDE2633-1D8E-EEA2-C61D-06E780C19E46}"/>
           </ac:spMkLst>
         </pc:spChg>
-        <pc:spChg chg="mod topLvl">
-          <ac:chgData name="城谷 匠" userId="afbae57c-d4ca-4e58-bc9a-6f765e208d89" providerId="ADAL" clId="{FD963559-32B2-43B7-8F97-A1E47AC731FA}" dt="2026-06-12T04:27:18.499" v="11" actId="165"/>
+        <pc:spChg chg="mod">
+          <ac:chgData name="城谷 匠" userId="afbae57c-d4ca-4e58-bc9a-6f765e208d89" providerId="ADAL" clId="{FD963559-32B2-43B7-8F97-A1E47AC731FA}" dt="2026-10-05T06:21:36.004" v="38" actId="1076"/>
           <ac:spMkLst>
             <pc:docMk/>
             <pc:sldMk cId="1156372304" sldId="256"/>
             <ac:spMk id="22" creationId="{5122F321-7C0D-8ED7-4C52-DBDFCA3C5BC0}"/>
           </ac:spMkLst>
         </pc:spChg>
-        <pc:spChg chg="mod topLvl">
-          <ac:chgData name="城谷 匠" userId="afbae57c-d4ca-4e58-bc9a-6f765e208d89" providerId="ADAL" clId="{FD963559-32B2-43B7-8F97-A1E47AC731FA}" dt="2026-06-12T04:27:18.499" v="11" actId="165"/>
+        <pc:spChg chg="mod">
+          <ac:chgData name="城谷 匠" userId="afbae57c-d4ca-4e58-bc9a-6f765e208d89" providerId="ADAL" clId="{FD963559-32B2-43B7-8F97-A1E47AC731FA}" dt="2026-10-05T06:21:30.221" v="37" actId="1076"/>
           <ac:spMkLst>
             <pc:docMk/>
             <pc:sldMk cId="1156372304" sldId="256"/>
             <ac:spMk id="23" creationId="{E0FAB9D4-8F6A-64C2-8D67-9132DA54ED87}"/>
           </ac:spMkLst>
         </pc:spChg>
-        <pc:picChg chg="mod topLvl">
-          <ac:chgData name="城谷 匠" userId="afbae57c-d4ca-4e58-bc9a-6f765e208d89" providerId="ADAL" clId="{FD963559-32B2-43B7-8F97-A1E47AC731FA}" dt="2026-06-12T04:27:18.499" v="11" actId="165"/>
+        <pc:picChg chg="del">
+          <ac:chgData name="城谷 匠" userId="afbae57c-d4ca-4e58-bc9a-6f765e208d89" providerId="ADAL" clId="{FD963559-32B2-43B7-8F97-A1E47AC731FA}" dt="2026-10-05T06:19:47.326" v="22" actId="478"/>
           <ac:picMkLst>
             <pc:docMk/>
             <pc:sldMk cId="1156372304" sldId="256"/>
             <ac:picMk id="5" creationId="{B3880868-382E-4AC9-32F7-F28691D35BEA}"/>
           </ac:picMkLst>
         </pc:picChg>
-        <pc:picChg chg="mod topLvl">
-          <ac:chgData name="城谷 匠" userId="afbae57c-d4ca-4e58-bc9a-6f765e208d89" providerId="ADAL" clId="{FD963559-32B2-43B7-8F97-A1E47AC731FA}" dt="2026-06-12T04:27:18.499" v="11" actId="165"/>
+        <pc:picChg chg="mod">
+          <ac:chgData name="城谷 匠" userId="afbae57c-d4ca-4e58-bc9a-6f765e208d89" providerId="ADAL" clId="{FD963559-32B2-43B7-8F97-A1E47AC731FA}" dt="2026-10-05T06:20:07.473" v="29" actId="1076"/>
           <ac:picMkLst>
             <pc:docMk/>
             <pc:sldMk cId="1156372304" sldId="256"/>
             <ac:picMk id="6" creationId="{97A09EAD-F0F0-5E7F-5DF7-7BA0A63C6513}"/>
           </ac:picMkLst>
         </pc:picChg>
-        <pc:picChg chg="mod topLvl">
-          <ac:chgData name="城谷 匠" userId="afbae57c-d4ca-4e58-bc9a-6f765e208d89" providerId="ADAL" clId="{FD963559-32B2-43B7-8F97-A1E47AC731FA}" dt="2026-06-12T04:27:18.499" v="11" actId="165"/>
+        <pc:picChg chg="mod">
+          <ac:chgData name="城谷 匠" userId="afbae57c-d4ca-4e58-bc9a-6f765e208d89" providerId="ADAL" clId="{FD963559-32B2-43B7-8F97-A1E47AC731FA}" dt="2026-10-05T06:21:20.478" v="36" actId="1076"/>
           <ac:picMkLst>
             <pc:docMk/>
             <pc:sldMk cId="1156372304" sldId="256"/>
             <ac:picMk id="7" creationId="{7DC96729-01FD-BCD1-73B7-1C1CC2007A08}"/>
           </ac:picMkLst>
         </pc:picChg>
-        <pc:picChg chg="mod topLvl">
-          <ac:chgData name="城谷 匠" userId="afbae57c-d4ca-4e58-bc9a-6f765e208d89" providerId="ADAL" clId="{FD963559-32B2-43B7-8F97-A1E47AC731FA}" dt="2026-06-12T04:27:18.499" v="11" actId="165"/>
+        <pc:picChg chg="del mod topLvl">
+          <ac:chgData name="城谷 匠" userId="afbae57c-d4ca-4e58-bc9a-6f765e208d89" providerId="ADAL" clId="{FD963559-32B2-43B7-8F97-A1E47AC731FA}" dt="2026-10-05T06:19:24.975" v="16" actId="478"/>
           <ac:picMkLst>
             <pc:docMk/>
             <pc:sldMk cId="1156372304" sldId="256"/>
             <ac:picMk id="8" creationId="{E522FE0C-DF3D-F075-D0D5-84352E243FA7}"/>
           </ac:picMkLst>
         </pc:picChg>
-        <pc:cxnChg chg="add mod">
-          <ac:chgData name="城谷 匠" userId="afbae57c-d4ca-4e58-bc9a-6f765e208d89" providerId="ADAL" clId="{FD963559-32B2-43B7-8F97-A1E47AC731FA}" dt="2026-06-12T04:27:37.875" v="15" actId="208"/>
+        <pc:picChg chg="del">
+          <ac:chgData name="城谷 匠" userId="afbae57c-d4ca-4e58-bc9a-6f765e208d89" providerId="ADAL" clId="{FD963559-32B2-43B7-8F97-A1E47AC731FA}" dt="2026-10-05T06:19:33.049" v="18" actId="478"/>
+          <ac:picMkLst>
+            <pc:docMk/>
+            <pc:sldMk cId="1156372304" sldId="256"/>
+            <ac:picMk id="9" creationId="{A940BD57-6C7C-5A30-87EB-EE85A1DBB8C0}"/>
+          </ac:picMkLst>
+        </pc:picChg>
+        <pc:picChg chg="del">
+          <ac:chgData name="城谷 匠" userId="afbae57c-d4ca-4e58-bc9a-6f765e208d89" providerId="ADAL" clId="{FD963559-32B2-43B7-8F97-A1E47AC731FA}" dt="2026-10-05T06:19:54.210" v="25" actId="478"/>
+          <ac:picMkLst>
+            <pc:docMk/>
+            <pc:sldMk cId="1156372304" sldId="256"/>
+            <ac:picMk id="11" creationId="{1C49E6CD-EF0B-AC43-5FA8-4EDA20221E18}"/>
+          </ac:picMkLst>
+        </pc:picChg>
+        <pc:picChg chg="add del mod">
+          <ac:chgData name="城谷 匠" userId="afbae57c-d4ca-4e58-bc9a-6f765e208d89" providerId="ADAL" clId="{FD963559-32B2-43B7-8F97-A1E47AC731FA}" dt="2026-10-05T06:21:51.171" v="42" actId="478"/>
+          <ac:picMkLst>
+            <pc:docMk/>
+            <pc:sldMk cId="1156372304" sldId="256"/>
+            <ac:picMk id="26" creationId="{63797AB4-E8A5-1C04-431D-5715E4560CE7}"/>
+          </ac:picMkLst>
+        </pc:picChg>
+        <pc:picChg chg="add mod">
+          <ac:chgData name="城谷 匠" userId="afbae57c-d4ca-4e58-bc9a-6f765e208d89" providerId="ADAL" clId="{FD963559-32B2-43B7-8F97-A1E47AC731FA}" dt="2026-10-05T06:23:07.830" v="54" actId="1076"/>
+          <ac:picMkLst>
+            <pc:docMk/>
+            <pc:sldMk cId="1156372304" sldId="256"/>
+            <ac:picMk id="40" creationId="{53108FBA-FC4B-7EBA-BD31-16AEFDC0B322}"/>
+          </ac:picMkLst>
+        </pc:picChg>
+        <pc:cxnChg chg="del mod">
+          <ac:chgData name="城谷 匠" userId="afbae57c-d4ca-4e58-bc9a-6f765e208d89" providerId="ADAL" clId="{FD963559-32B2-43B7-8F97-A1E47AC731FA}" dt="2026-10-05T06:19:59.024" v="27" actId="478"/>
+          <ac:cxnSpMkLst>
+            <pc:docMk/>
+            <pc:sldMk cId="1156372304" sldId="256"/>
+            <ac:cxnSpMk id="10" creationId="{51A3008E-6A9F-5086-F63A-863795834288}"/>
+          </ac:cxnSpMkLst>
+        </pc:cxnChg>
+        <pc:cxnChg chg="mod">
+          <ac:chgData name="城谷 匠" userId="afbae57c-d4ca-4e58-bc9a-6f765e208d89" providerId="ADAL" clId="{FD963559-32B2-43B7-8F97-A1E47AC731FA}" dt="2026-10-05T06:23:07.830" v="54" actId="1076"/>
+          <ac:cxnSpMkLst>
+            <pc:docMk/>
+            <pc:sldMk cId="1156372304" sldId="256"/>
+            <ac:cxnSpMk id="13" creationId="{6CBCA35B-ABCD-BD02-C107-38A51324CDBD}"/>
+          </ac:cxnSpMkLst>
+        </pc:cxnChg>
+        <pc:cxnChg chg="del mod">
+          <ac:chgData name="城谷 匠" userId="afbae57c-d4ca-4e58-bc9a-6f765e208d89" providerId="ADAL" clId="{FD963559-32B2-43B7-8F97-A1E47AC731FA}" dt="2026-10-05T06:21:54.365" v="43" actId="478"/>
+          <ac:cxnSpMkLst>
+            <pc:docMk/>
+            <pc:sldMk cId="1156372304" sldId="256"/>
+            <ac:cxnSpMk id="14" creationId="{5665F72F-0E9C-93A9-29FB-1BC3EF398E73}"/>
+          </ac:cxnSpMkLst>
+        </pc:cxnChg>
+        <pc:cxnChg chg="del mod">
+          <ac:chgData name="城谷 匠" userId="afbae57c-d4ca-4e58-bc9a-6f765e208d89" providerId="ADAL" clId="{FD963559-32B2-43B7-8F97-A1E47AC731FA}" dt="2026-10-05T06:19:26.733" v="17" actId="478"/>
+          <ac:cxnSpMkLst>
+            <pc:docMk/>
+            <pc:sldMk cId="1156372304" sldId="256"/>
+            <ac:cxnSpMk id="15" creationId="{C5B81EFA-4947-66CF-F891-8299F25410FA}"/>
+          </ac:cxnSpMkLst>
+        </pc:cxnChg>
+        <pc:cxnChg chg="mod">
+          <ac:chgData name="城谷 匠" userId="afbae57c-d4ca-4e58-bc9a-6f765e208d89" providerId="ADAL" clId="{FD963559-32B2-43B7-8F97-A1E47AC731FA}" dt="2026-10-05T06:23:07.830" v="54" actId="1076"/>
+          <ac:cxnSpMkLst>
+            <pc:docMk/>
+            <pc:sldMk cId="1156372304" sldId="256"/>
+            <ac:cxnSpMk id="16" creationId="{9A7801F3-E0BF-F538-5DE4-F6D6A9CBE102}"/>
+          </ac:cxnSpMkLst>
+        </pc:cxnChg>
+        <pc:cxnChg chg="mod">
+          <ac:chgData name="城谷 匠" userId="afbae57c-d4ca-4e58-bc9a-6f765e208d89" providerId="ADAL" clId="{FD963559-32B2-43B7-8F97-A1E47AC731FA}" dt="2026-10-05T06:19:47.326" v="22" actId="478"/>
+          <ac:cxnSpMkLst>
+            <pc:docMk/>
+            <pc:sldMk cId="1156372304" sldId="256"/>
+            <ac:cxnSpMk id="19" creationId="{BEA994B3-D82B-D8D6-55F0-9174BB4C50E6}"/>
+          </ac:cxnSpMkLst>
+        </pc:cxnChg>
+        <pc:cxnChg chg="mod">
+          <ac:chgData name="城谷 匠" userId="afbae57c-d4ca-4e58-bc9a-6f765e208d89" providerId="ADAL" clId="{FD963559-32B2-43B7-8F97-A1E47AC731FA}" dt="2026-10-05T06:21:46.902" v="41" actId="14100"/>
+          <ac:cxnSpMkLst>
+            <pc:docMk/>
+            <pc:sldMk cId="1156372304" sldId="256"/>
+            <ac:cxnSpMk id="24" creationId="{BEF72F5E-CE1A-9E0E-3601-3311B5F1A2B8}"/>
+          </ac:cxnSpMkLst>
+        </pc:cxnChg>
+        <pc:cxnChg chg="del mod">
+          <ac:chgData name="城谷 匠" userId="afbae57c-d4ca-4e58-bc9a-6f765e208d89" providerId="ADAL" clId="{FD963559-32B2-43B7-8F97-A1E47AC731FA}" dt="2026-10-05T06:19:54.210" v="25" actId="478"/>
+          <ac:cxnSpMkLst>
+            <pc:docMk/>
+            <pc:sldMk cId="1156372304" sldId="256"/>
+            <ac:cxnSpMk id="25" creationId="{EB44ECEB-367D-086D-8E15-97D80659D6AB}"/>
+          </ac:cxnSpMkLst>
+        </pc:cxnChg>
+        <pc:cxnChg chg="del mod">
+          <ac:chgData name="城谷 匠" userId="afbae57c-d4ca-4e58-bc9a-6f765e208d89" providerId="ADAL" clId="{FD963559-32B2-43B7-8F97-A1E47AC731FA}" dt="2026-10-05T06:20:19.568" v="31" actId="478"/>
           <ac:cxnSpMkLst>
             <pc:docMk/>
             <pc:sldMk cId="1156372304" sldId="256"/>
@@ -285,399 +373,6 @@
           </ac:cxnSpMkLst>
         </pc:cxnChg>
       </pc:sldChg>
-      <pc:sldChg chg="modSp mod">
-        <pc:chgData name="城谷 匠" userId="afbae57c-d4ca-4e58-bc9a-6f765e208d89" providerId="ADAL" clId="{FD963559-32B2-43B7-8F97-A1E47AC731FA}" dt="2026-06-12T01:30:55.667" v="10" actId="27636"/>
-        <pc:sldMkLst>
-          <pc:docMk/>
-          <pc:sldMk cId="2907739921" sldId="257"/>
-        </pc:sldMkLst>
-        <pc:spChg chg="mod">
-          <ac:chgData name="城谷 匠" userId="afbae57c-d4ca-4e58-bc9a-6f765e208d89" providerId="ADAL" clId="{FD963559-32B2-43B7-8F97-A1E47AC731FA}" dt="2026-06-12T01:30:55.667" v="10" actId="27636"/>
-          <ac:spMkLst>
-            <pc:docMk/>
-            <pc:sldMk cId="2907739921" sldId="257"/>
-            <ac:spMk id="2" creationId="{2A23A21B-CB13-AD57-6FF0-0F8D6D15B5C5}"/>
-          </ac:spMkLst>
-        </pc:spChg>
-      </pc:sldChg>
-      <pc:sldMasterChg chg="del delSldLayout">
-        <pc:chgData name="城谷 匠" userId="afbae57c-d4ca-4e58-bc9a-6f765e208d89" providerId="ADAL" clId="{FD963559-32B2-43B7-8F97-A1E47AC731FA}" dt="2026-06-11T15:50:20.973" v="2"/>
-        <pc:sldMasterMkLst>
-          <pc:docMk/>
-          <pc:sldMasterMk cId="128601625" sldId="2147483789"/>
-        </pc:sldMasterMkLst>
-        <pc:sldLayoutChg chg="del">
-          <pc:chgData name="城谷 匠" userId="afbae57c-d4ca-4e58-bc9a-6f765e208d89" providerId="ADAL" clId="{FD963559-32B2-43B7-8F97-A1E47AC731FA}" dt="2026-06-11T15:50:20.973" v="2"/>
-          <pc:sldLayoutMkLst>
-            <pc:docMk/>
-            <pc:sldMasterMk cId="128601625" sldId="2147483789"/>
-            <pc:sldLayoutMk cId="1721238252" sldId="2147483790"/>
-          </pc:sldLayoutMkLst>
-        </pc:sldLayoutChg>
-        <pc:sldLayoutChg chg="del">
-          <pc:chgData name="城谷 匠" userId="afbae57c-d4ca-4e58-bc9a-6f765e208d89" providerId="ADAL" clId="{FD963559-32B2-43B7-8F97-A1E47AC731FA}" dt="2026-06-11T15:50:20.973" v="2"/>
-          <pc:sldLayoutMkLst>
-            <pc:docMk/>
-            <pc:sldMasterMk cId="128601625" sldId="2147483789"/>
-            <pc:sldLayoutMk cId="3523655976" sldId="2147483791"/>
-          </pc:sldLayoutMkLst>
-        </pc:sldLayoutChg>
-        <pc:sldLayoutChg chg="del">
-          <pc:chgData name="城谷 匠" userId="afbae57c-d4ca-4e58-bc9a-6f765e208d89" providerId="ADAL" clId="{FD963559-32B2-43B7-8F97-A1E47AC731FA}" dt="2026-06-11T15:50:20.973" v="2"/>
-          <pc:sldLayoutMkLst>
-            <pc:docMk/>
-            <pc:sldMasterMk cId="128601625" sldId="2147483789"/>
-            <pc:sldLayoutMk cId="3395464340" sldId="2147483792"/>
-          </pc:sldLayoutMkLst>
-        </pc:sldLayoutChg>
-        <pc:sldLayoutChg chg="del">
-          <pc:chgData name="城谷 匠" userId="afbae57c-d4ca-4e58-bc9a-6f765e208d89" providerId="ADAL" clId="{FD963559-32B2-43B7-8F97-A1E47AC731FA}" dt="2026-06-11T15:50:20.973" v="2"/>
-          <pc:sldLayoutMkLst>
-            <pc:docMk/>
-            <pc:sldMasterMk cId="128601625" sldId="2147483789"/>
-            <pc:sldLayoutMk cId="301721356" sldId="2147483793"/>
-          </pc:sldLayoutMkLst>
-        </pc:sldLayoutChg>
-        <pc:sldLayoutChg chg="del">
-          <pc:chgData name="城谷 匠" userId="afbae57c-d4ca-4e58-bc9a-6f765e208d89" providerId="ADAL" clId="{FD963559-32B2-43B7-8F97-A1E47AC731FA}" dt="2026-06-11T15:50:20.973" v="2"/>
-          <pc:sldLayoutMkLst>
-            <pc:docMk/>
-            <pc:sldMasterMk cId="128601625" sldId="2147483789"/>
-            <pc:sldLayoutMk cId="683526902" sldId="2147483841"/>
-          </pc:sldLayoutMkLst>
-        </pc:sldLayoutChg>
-        <pc:sldLayoutChg chg="del">
-          <pc:chgData name="城谷 匠" userId="afbae57c-d4ca-4e58-bc9a-6f765e208d89" providerId="ADAL" clId="{FD963559-32B2-43B7-8F97-A1E47AC731FA}" dt="2026-06-11T15:50:20.973" v="2"/>
-          <pc:sldLayoutMkLst>
-            <pc:docMk/>
-            <pc:sldMasterMk cId="128601625" sldId="2147483789"/>
-            <pc:sldLayoutMk cId="3742539404" sldId="2147483842"/>
-          </pc:sldLayoutMkLst>
-        </pc:sldLayoutChg>
-        <pc:sldLayoutChg chg="del">
-          <pc:chgData name="城谷 匠" userId="afbae57c-d4ca-4e58-bc9a-6f765e208d89" providerId="ADAL" clId="{FD963559-32B2-43B7-8F97-A1E47AC731FA}" dt="2026-06-11T15:50:20.973" v="2"/>
-          <pc:sldLayoutMkLst>
-            <pc:docMk/>
-            <pc:sldMasterMk cId="128601625" sldId="2147483789"/>
-            <pc:sldLayoutMk cId="2182006713" sldId="2147483843"/>
-          </pc:sldLayoutMkLst>
-        </pc:sldLayoutChg>
-      </pc:sldMasterChg>
-      <pc:sldMasterChg chg="del delSldLayout">
-        <pc:chgData name="城谷 匠" userId="afbae57c-d4ca-4e58-bc9a-6f765e208d89" providerId="ADAL" clId="{FD963559-32B2-43B7-8F97-A1E47AC731FA}" dt="2026-06-11T15:50:20.973" v="2"/>
-        <pc:sldMasterMkLst>
-          <pc:docMk/>
-          <pc:sldMasterMk cId="2413593382" sldId="2147483794"/>
-        </pc:sldMasterMkLst>
-        <pc:sldLayoutChg chg="del">
-          <pc:chgData name="城谷 匠" userId="afbae57c-d4ca-4e58-bc9a-6f765e208d89" providerId="ADAL" clId="{FD963559-32B2-43B7-8F97-A1E47AC731FA}" dt="2026-06-11T15:50:20.973" v="2"/>
-          <pc:sldLayoutMkLst>
-            <pc:docMk/>
-            <pc:sldMasterMk cId="2413593382" sldId="2147483794"/>
-            <pc:sldLayoutMk cId="4277063529" sldId="2147483795"/>
-          </pc:sldLayoutMkLst>
-        </pc:sldLayoutChg>
-        <pc:sldLayoutChg chg="del">
-          <pc:chgData name="城谷 匠" userId="afbae57c-d4ca-4e58-bc9a-6f765e208d89" providerId="ADAL" clId="{FD963559-32B2-43B7-8F97-A1E47AC731FA}" dt="2026-06-11T15:50:20.973" v="2"/>
-          <pc:sldLayoutMkLst>
-            <pc:docMk/>
-            <pc:sldMasterMk cId="2413593382" sldId="2147483794"/>
-            <pc:sldLayoutMk cId="3971744467" sldId="2147483796"/>
-          </pc:sldLayoutMkLst>
-        </pc:sldLayoutChg>
-        <pc:sldLayoutChg chg="del">
-          <pc:chgData name="城谷 匠" userId="afbae57c-d4ca-4e58-bc9a-6f765e208d89" providerId="ADAL" clId="{FD963559-32B2-43B7-8F97-A1E47AC731FA}" dt="2026-06-11T15:50:20.973" v="2"/>
-          <pc:sldLayoutMkLst>
-            <pc:docMk/>
-            <pc:sldMasterMk cId="2413593382" sldId="2147483794"/>
-            <pc:sldLayoutMk cId="566915450" sldId="2147483797"/>
-          </pc:sldLayoutMkLst>
-        </pc:sldLayoutChg>
-        <pc:sldLayoutChg chg="del">
-          <pc:chgData name="城谷 匠" userId="afbae57c-d4ca-4e58-bc9a-6f765e208d89" providerId="ADAL" clId="{FD963559-32B2-43B7-8F97-A1E47AC731FA}" dt="2026-06-11T15:50:20.973" v="2"/>
-          <pc:sldLayoutMkLst>
-            <pc:docMk/>
-            <pc:sldMasterMk cId="2413593382" sldId="2147483794"/>
-            <pc:sldLayoutMk cId="2842771412" sldId="2147483798"/>
-          </pc:sldLayoutMkLst>
-        </pc:sldLayoutChg>
-        <pc:sldLayoutChg chg="del">
-          <pc:chgData name="城谷 匠" userId="afbae57c-d4ca-4e58-bc9a-6f765e208d89" providerId="ADAL" clId="{FD963559-32B2-43B7-8F97-A1E47AC731FA}" dt="2026-06-11T15:50:20.973" v="2"/>
-          <pc:sldLayoutMkLst>
-            <pc:docMk/>
-            <pc:sldMasterMk cId="2413593382" sldId="2147483794"/>
-            <pc:sldLayoutMk cId="1350028741" sldId="2147483832"/>
-          </pc:sldLayoutMkLst>
-        </pc:sldLayoutChg>
-        <pc:sldLayoutChg chg="del">
-          <pc:chgData name="城谷 匠" userId="afbae57c-d4ca-4e58-bc9a-6f765e208d89" providerId="ADAL" clId="{FD963559-32B2-43B7-8F97-A1E47AC731FA}" dt="2026-06-11T15:50:20.973" v="2"/>
-          <pc:sldLayoutMkLst>
-            <pc:docMk/>
-            <pc:sldMasterMk cId="2413593382" sldId="2147483794"/>
-            <pc:sldLayoutMk cId="316528331" sldId="2147483833"/>
-          </pc:sldLayoutMkLst>
-        </pc:sldLayoutChg>
-        <pc:sldLayoutChg chg="del">
-          <pc:chgData name="城谷 匠" userId="afbae57c-d4ca-4e58-bc9a-6f765e208d89" providerId="ADAL" clId="{FD963559-32B2-43B7-8F97-A1E47AC731FA}" dt="2026-06-11T15:50:20.973" v="2"/>
-          <pc:sldLayoutMkLst>
-            <pc:docMk/>
-            <pc:sldMasterMk cId="2413593382" sldId="2147483794"/>
-            <pc:sldLayoutMk cId="506680430" sldId="2147483834"/>
-          </pc:sldLayoutMkLst>
-        </pc:sldLayoutChg>
-      </pc:sldMasterChg>
-      <pc:sldMasterChg chg="del delSldLayout">
-        <pc:chgData name="城谷 匠" userId="afbae57c-d4ca-4e58-bc9a-6f765e208d89" providerId="ADAL" clId="{FD963559-32B2-43B7-8F97-A1E47AC731FA}" dt="2026-06-11T15:50:20.973" v="2"/>
-        <pc:sldMasterMkLst>
-          <pc:docMk/>
-          <pc:sldMasterMk cId="3392038706" sldId="2147483799"/>
-        </pc:sldMasterMkLst>
-        <pc:sldLayoutChg chg="del">
-          <pc:chgData name="城谷 匠" userId="afbae57c-d4ca-4e58-bc9a-6f765e208d89" providerId="ADAL" clId="{FD963559-32B2-43B7-8F97-A1E47AC731FA}" dt="2026-06-11T15:50:20.973" v="2"/>
-          <pc:sldLayoutMkLst>
-            <pc:docMk/>
-            <pc:sldMasterMk cId="3392038706" sldId="2147483799"/>
-            <pc:sldLayoutMk cId="269627886" sldId="2147483800"/>
-          </pc:sldLayoutMkLst>
-        </pc:sldLayoutChg>
-        <pc:sldLayoutChg chg="del">
-          <pc:chgData name="城谷 匠" userId="afbae57c-d4ca-4e58-bc9a-6f765e208d89" providerId="ADAL" clId="{FD963559-32B2-43B7-8F97-A1E47AC731FA}" dt="2026-06-11T15:50:20.973" v="2"/>
-          <pc:sldLayoutMkLst>
-            <pc:docMk/>
-            <pc:sldMasterMk cId="3392038706" sldId="2147483799"/>
-            <pc:sldLayoutMk cId="2608010574" sldId="2147483801"/>
-          </pc:sldLayoutMkLst>
-        </pc:sldLayoutChg>
-        <pc:sldLayoutChg chg="del">
-          <pc:chgData name="城谷 匠" userId="afbae57c-d4ca-4e58-bc9a-6f765e208d89" providerId="ADAL" clId="{FD963559-32B2-43B7-8F97-A1E47AC731FA}" dt="2026-06-11T15:50:20.973" v="2"/>
-          <pc:sldLayoutMkLst>
-            <pc:docMk/>
-            <pc:sldMasterMk cId="3392038706" sldId="2147483799"/>
-            <pc:sldLayoutMk cId="3146742256" sldId="2147483802"/>
-          </pc:sldLayoutMkLst>
-        </pc:sldLayoutChg>
-        <pc:sldLayoutChg chg="del">
-          <pc:chgData name="城谷 匠" userId="afbae57c-d4ca-4e58-bc9a-6f765e208d89" providerId="ADAL" clId="{FD963559-32B2-43B7-8F97-A1E47AC731FA}" dt="2026-06-11T15:50:20.973" v="2"/>
-          <pc:sldLayoutMkLst>
-            <pc:docMk/>
-            <pc:sldMasterMk cId="3392038706" sldId="2147483799"/>
-            <pc:sldLayoutMk cId="2088456049" sldId="2147483803"/>
-          </pc:sldLayoutMkLst>
-        </pc:sldLayoutChg>
-        <pc:sldLayoutChg chg="del">
-          <pc:chgData name="城谷 匠" userId="afbae57c-d4ca-4e58-bc9a-6f765e208d89" providerId="ADAL" clId="{FD963559-32B2-43B7-8F97-A1E47AC731FA}" dt="2026-06-11T15:50:20.973" v="2"/>
-          <pc:sldLayoutMkLst>
-            <pc:docMk/>
-            <pc:sldMasterMk cId="3392038706" sldId="2147483799"/>
-            <pc:sldLayoutMk cId="4183914307" sldId="2147483838"/>
-          </pc:sldLayoutMkLst>
-        </pc:sldLayoutChg>
-        <pc:sldLayoutChg chg="del">
-          <pc:chgData name="城谷 匠" userId="afbae57c-d4ca-4e58-bc9a-6f765e208d89" providerId="ADAL" clId="{FD963559-32B2-43B7-8F97-A1E47AC731FA}" dt="2026-06-11T15:50:20.973" v="2"/>
-          <pc:sldLayoutMkLst>
-            <pc:docMk/>
-            <pc:sldMasterMk cId="3392038706" sldId="2147483799"/>
-            <pc:sldLayoutMk cId="2518797957" sldId="2147483839"/>
-          </pc:sldLayoutMkLst>
-        </pc:sldLayoutChg>
-        <pc:sldLayoutChg chg="del">
-          <pc:chgData name="城谷 匠" userId="afbae57c-d4ca-4e58-bc9a-6f765e208d89" providerId="ADAL" clId="{FD963559-32B2-43B7-8F97-A1E47AC731FA}" dt="2026-06-11T15:50:20.973" v="2"/>
-          <pc:sldLayoutMkLst>
-            <pc:docMk/>
-            <pc:sldMasterMk cId="3392038706" sldId="2147483799"/>
-            <pc:sldLayoutMk cId="3208650685" sldId="2147483840"/>
-          </pc:sldLayoutMkLst>
-        </pc:sldLayoutChg>
-      </pc:sldMasterChg>
-      <pc:sldMasterChg chg="del delSldLayout">
-        <pc:chgData name="城谷 匠" userId="afbae57c-d4ca-4e58-bc9a-6f765e208d89" providerId="ADAL" clId="{FD963559-32B2-43B7-8F97-A1E47AC731FA}" dt="2026-06-11T15:50:20.973" v="2"/>
-        <pc:sldMasterMkLst>
-          <pc:docMk/>
-          <pc:sldMasterMk cId="4237856623" sldId="2147483804"/>
-        </pc:sldMasterMkLst>
-        <pc:sldLayoutChg chg="del">
-          <pc:chgData name="城谷 匠" userId="afbae57c-d4ca-4e58-bc9a-6f765e208d89" providerId="ADAL" clId="{FD963559-32B2-43B7-8F97-A1E47AC731FA}" dt="2026-06-11T15:50:20.973" v="2"/>
-          <pc:sldLayoutMkLst>
-            <pc:docMk/>
-            <pc:sldMasterMk cId="4237856623" sldId="2147483804"/>
-            <pc:sldLayoutMk cId="524179403" sldId="2147483805"/>
-          </pc:sldLayoutMkLst>
-        </pc:sldLayoutChg>
-        <pc:sldLayoutChg chg="del">
-          <pc:chgData name="城谷 匠" userId="afbae57c-d4ca-4e58-bc9a-6f765e208d89" providerId="ADAL" clId="{FD963559-32B2-43B7-8F97-A1E47AC731FA}" dt="2026-06-11T15:50:20.973" v="2"/>
-          <pc:sldLayoutMkLst>
-            <pc:docMk/>
-            <pc:sldMasterMk cId="4237856623" sldId="2147483804"/>
-            <pc:sldLayoutMk cId="2368200639" sldId="2147483806"/>
-          </pc:sldLayoutMkLst>
-        </pc:sldLayoutChg>
-        <pc:sldLayoutChg chg="del">
-          <pc:chgData name="城谷 匠" userId="afbae57c-d4ca-4e58-bc9a-6f765e208d89" providerId="ADAL" clId="{FD963559-32B2-43B7-8F97-A1E47AC731FA}" dt="2026-06-11T15:50:20.973" v="2"/>
-          <pc:sldLayoutMkLst>
-            <pc:docMk/>
-            <pc:sldMasterMk cId="4237856623" sldId="2147483804"/>
-            <pc:sldLayoutMk cId="3008731706" sldId="2147483807"/>
-          </pc:sldLayoutMkLst>
-        </pc:sldLayoutChg>
-        <pc:sldLayoutChg chg="del">
-          <pc:chgData name="城谷 匠" userId="afbae57c-d4ca-4e58-bc9a-6f765e208d89" providerId="ADAL" clId="{FD963559-32B2-43B7-8F97-A1E47AC731FA}" dt="2026-06-11T15:50:20.973" v="2"/>
-          <pc:sldLayoutMkLst>
-            <pc:docMk/>
-            <pc:sldMasterMk cId="4237856623" sldId="2147483804"/>
-            <pc:sldLayoutMk cId="3817497702" sldId="2147483808"/>
-          </pc:sldLayoutMkLst>
-        </pc:sldLayoutChg>
-        <pc:sldLayoutChg chg="del">
-          <pc:chgData name="城谷 匠" userId="afbae57c-d4ca-4e58-bc9a-6f765e208d89" providerId="ADAL" clId="{FD963559-32B2-43B7-8F97-A1E47AC731FA}" dt="2026-06-11T15:50:20.973" v="2"/>
-          <pc:sldLayoutMkLst>
-            <pc:docMk/>
-            <pc:sldMasterMk cId="4237856623" sldId="2147483804"/>
-            <pc:sldLayoutMk cId="1400597756" sldId="2147483844"/>
-          </pc:sldLayoutMkLst>
-        </pc:sldLayoutChg>
-        <pc:sldLayoutChg chg="del">
-          <pc:chgData name="城谷 匠" userId="afbae57c-d4ca-4e58-bc9a-6f765e208d89" providerId="ADAL" clId="{FD963559-32B2-43B7-8F97-A1E47AC731FA}" dt="2026-06-11T15:50:20.973" v="2"/>
-          <pc:sldLayoutMkLst>
-            <pc:docMk/>
-            <pc:sldMasterMk cId="4237856623" sldId="2147483804"/>
-            <pc:sldLayoutMk cId="4064353193" sldId="2147483845"/>
-          </pc:sldLayoutMkLst>
-        </pc:sldLayoutChg>
-        <pc:sldLayoutChg chg="del">
-          <pc:chgData name="城谷 匠" userId="afbae57c-d4ca-4e58-bc9a-6f765e208d89" providerId="ADAL" clId="{FD963559-32B2-43B7-8F97-A1E47AC731FA}" dt="2026-06-11T15:50:20.973" v="2"/>
-          <pc:sldLayoutMkLst>
-            <pc:docMk/>
-            <pc:sldMasterMk cId="4237856623" sldId="2147483804"/>
-            <pc:sldLayoutMk cId="1645094157" sldId="2147483846"/>
-          </pc:sldLayoutMkLst>
-        </pc:sldLayoutChg>
-      </pc:sldMasterChg>
-      <pc:sldMasterChg chg="del delSldLayout">
-        <pc:chgData name="城谷 匠" userId="afbae57c-d4ca-4e58-bc9a-6f765e208d89" providerId="ADAL" clId="{FD963559-32B2-43B7-8F97-A1E47AC731FA}" dt="2026-06-11T15:50:20.973" v="2"/>
-        <pc:sldMasterMkLst>
-          <pc:docMk/>
-          <pc:sldMasterMk cId="3864806231" sldId="2147483809"/>
-        </pc:sldMasterMkLst>
-        <pc:sldLayoutChg chg="del">
-          <pc:chgData name="城谷 匠" userId="afbae57c-d4ca-4e58-bc9a-6f765e208d89" providerId="ADAL" clId="{FD963559-32B2-43B7-8F97-A1E47AC731FA}" dt="2026-06-11T15:50:20.973" v="2"/>
-          <pc:sldLayoutMkLst>
-            <pc:docMk/>
-            <pc:sldMasterMk cId="3864806231" sldId="2147483809"/>
-            <pc:sldLayoutMk cId="3622725091" sldId="2147483810"/>
-          </pc:sldLayoutMkLst>
-        </pc:sldLayoutChg>
-        <pc:sldLayoutChg chg="del">
-          <pc:chgData name="城谷 匠" userId="afbae57c-d4ca-4e58-bc9a-6f765e208d89" providerId="ADAL" clId="{FD963559-32B2-43B7-8F97-A1E47AC731FA}" dt="2026-06-11T15:50:20.973" v="2"/>
-          <pc:sldLayoutMkLst>
-            <pc:docMk/>
-            <pc:sldMasterMk cId="3864806231" sldId="2147483809"/>
-            <pc:sldLayoutMk cId="4243680784" sldId="2147483811"/>
-          </pc:sldLayoutMkLst>
-        </pc:sldLayoutChg>
-        <pc:sldLayoutChg chg="del">
-          <pc:chgData name="城谷 匠" userId="afbae57c-d4ca-4e58-bc9a-6f765e208d89" providerId="ADAL" clId="{FD963559-32B2-43B7-8F97-A1E47AC731FA}" dt="2026-06-11T15:50:20.973" v="2"/>
-          <pc:sldLayoutMkLst>
-            <pc:docMk/>
-            <pc:sldMasterMk cId="3864806231" sldId="2147483809"/>
-            <pc:sldLayoutMk cId="2934983927" sldId="2147483812"/>
-          </pc:sldLayoutMkLst>
-        </pc:sldLayoutChg>
-        <pc:sldLayoutChg chg="del">
-          <pc:chgData name="城谷 匠" userId="afbae57c-d4ca-4e58-bc9a-6f765e208d89" providerId="ADAL" clId="{FD963559-32B2-43B7-8F97-A1E47AC731FA}" dt="2026-06-11T15:50:20.973" v="2"/>
-          <pc:sldLayoutMkLst>
-            <pc:docMk/>
-            <pc:sldMasterMk cId="3864806231" sldId="2147483809"/>
-            <pc:sldLayoutMk cId="2744233648" sldId="2147483813"/>
-          </pc:sldLayoutMkLst>
-        </pc:sldLayoutChg>
-        <pc:sldLayoutChg chg="del">
-          <pc:chgData name="城谷 匠" userId="afbae57c-d4ca-4e58-bc9a-6f765e208d89" providerId="ADAL" clId="{FD963559-32B2-43B7-8F97-A1E47AC731FA}" dt="2026-06-11T15:50:20.973" v="2"/>
-          <pc:sldLayoutMkLst>
-            <pc:docMk/>
-            <pc:sldMasterMk cId="3864806231" sldId="2147483809"/>
-            <pc:sldLayoutMk cId="3021291248" sldId="2147483835"/>
-          </pc:sldLayoutMkLst>
-        </pc:sldLayoutChg>
-        <pc:sldLayoutChg chg="del">
-          <pc:chgData name="城谷 匠" userId="afbae57c-d4ca-4e58-bc9a-6f765e208d89" providerId="ADAL" clId="{FD963559-32B2-43B7-8F97-A1E47AC731FA}" dt="2026-06-11T15:50:20.973" v="2"/>
-          <pc:sldLayoutMkLst>
-            <pc:docMk/>
-            <pc:sldMasterMk cId="3864806231" sldId="2147483809"/>
-            <pc:sldLayoutMk cId="3070782973" sldId="2147483836"/>
-          </pc:sldLayoutMkLst>
-        </pc:sldLayoutChg>
-        <pc:sldLayoutChg chg="del">
-          <pc:chgData name="城谷 匠" userId="afbae57c-d4ca-4e58-bc9a-6f765e208d89" providerId="ADAL" clId="{FD963559-32B2-43B7-8F97-A1E47AC731FA}" dt="2026-06-11T15:50:20.973" v="2"/>
-          <pc:sldLayoutMkLst>
-            <pc:docMk/>
-            <pc:sldMasterMk cId="3864806231" sldId="2147483809"/>
-            <pc:sldLayoutMk cId="2483515379" sldId="2147483837"/>
-          </pc:sldLayoutMkLst>
-        </pc:sldLayoutChg>
-      </pc:sldMasterChg>
-      <pc:sldMasterChg chg="del delSldLayout">
-        <pc:chgData name="城谷 匠" userId="afbae57c-d4ca-4e58-bc9a-6f765e208d89" providerId="ADAL" clId="{FD963559-32B2-43B7-8F97-A1E47AC731FA}" dt="2026-06-11T15:50:20.973" v="2"/>
-        <pc:sldMasterMkLst>
-          <pc:docMk/>
-          <pc:sldMasterMk cId="3647132479" sldId="2147483814"/>
-        </pc:sldMasterMkLst>
-        <pc:sldLayoutChg chg="del">
-          <pc:chgData name="城谷 匠" userId="afbae57c-d4ca-4e58-bc9a-6f765e208d89" providerId="ADAL" clId="{FD963559-32B2-43B7-8F97-A1E47AC731FA}" dt="2026-06-11T15:50:20.973" v="2"/>
-          <pc:sldLayoutMkLst>
-            <pc:docMk/>
-            <pc:sldMasterMk cId="3647132479" sldId="2147483814"/>
-            <pc:sldLayoutMk cId="3307779927" sldId="2147483815"/>
-          </pc:sldLayoutMkLst>
-        </pc:sldLayoutChg>
-        <pc:sldLayoutChg chg="del">
-          <pc:chgData name="城谷 匠" userId="afbae57c-d4ca-4e58-bc9a-6f765e208d89" providerId="ADAL" clId="{FD963559-32B2-43B7-8F97-A1E47AC731FA}" dt="2026-06-11T15:50:20.973" v="2"/>
-          <pc:sldLayoutMkLst>
-            <pc:docMk/>
-            <pc:sldMasterMk cId="3647132479" sldId="2147483814"/>
-            <pc:sldLayoutMk cId="183499917" sldId="2147483816"/>
-          </pc:sldLayoutMkLst>
-        </pc:sldLayoutChg>
-        <pc:sldLayoutChg chg="del">
-          <pc:chgData name="城谷 匠" userId="afbae57c-d4ca-4e58-bc9a-6f765e208d89" providerId="ADAL" clId="{FD963559-32B2-43B7-8F97-A1E47AC731FA}" dt="2026-06-11T15:50:20.973" v="2"/>
-          <pc:sldLayoutMkLst>
-            <pc:docMk/>
-            <pc:sldMasterMk cId="3647132479" sldId="2147483814"/>
-            <pc:sldLayoutMk cId="2086437289" sldId="2147483817"/>
-          </pc:sldLayoutMkLst>
-        </pc:sldLayoutChg>
-        <pc:sldLayoutChg chg="del">
-          <pc:chgData name="城谷 匠" userId="afbae57c-d4ca-4e58-bc9a-6f765e208d89" providerId="ADAL" clId="{FD963559-32B2-43B7-8F97-A1E47AC731FA}" dt="2026-06-11T15:50:20.973" v="2"/>
-          <pc:sldLayoutMkLst>
-            <pc:docMk/>
-            <pc:sldMasterMk cId="3647132479" sldId="2147483814"/>
-            <pc:sldLayoutMk cId="115990555" sldId="2147483818"/>
-          </pc:sldLayoutMkLst>
-        </pc:sldLayoutChg>
-        <pc:sldLayoutChg chg="del">
-          <pc:chgData name="城谷 匠" userId="afbae57c-d4ca-4e58-bc9a-6f765e208d89" providerId="ADAL" clId="{FD963559-32B2-43B7-8F97-A1E47AC731FA}" dt="2026-06-11T15:50:20.973" v="2"/>
-          <pc:sldLayoutMkLst>
-            <pc:docMk/>
-            <pc:sldMasterMk cId="3647132479" sldId="2147483814"/>
-            <pc:sldLayoutMk cId="2217144526" sldId="2147483847"/>
-          </pc:sldLayoutMkLst>
-        </pc:sldLayoutChg>
-        <pc:sldLayoutChg chg="del">
-          <pc:chgData name="城谷 匠" userId="afbae57c-d4ca-4e58-bc9a-6f765e208d89" providerId="ADAL" clId="{FD963559-32B2-43B7-8F97-A1E47AC731FA}" dt="2026-06-11T15:50:20.973" v="2"/>
-          <pc:sldLayoutMkLst>
-            <pc:docMk/>
-            <pc:sldMasterMk cId="3647132479" sldId="2147483814"/>
-            <pc:sldLayoutMk cId="1018264743" sldId="2147483848"/>
-          </pc:sldLayoutMkLst>
-        </pc:sldLayoutChg>
-        <pc:sldLayoutChg chg="del">
-          <pc:chgData name="城谷 匠" userId="afbae57c-d4ca-4e58-bc9a-6f765e208d89" providerId="ADAL" clId="{FD963559-32B2-43B7-8F97-A1E47AC731FA}" dt="2026-06-11T15:50:20.973" v="2"/>
-          <pc:sldLayoutMkLst>
-            <pc:docMk/>
-            <pc:sldMasterMk cId="3647132479" sldId="2147483814"/>
-            <pc:sldLayoutMk cId="1080297994" sldId="2147483849"/>
-          </pc:sldLayoutMkLst>
-        </pc:sldLayoutChg>
-      </pc:sldMasterChg>
     </pc:docChg>
   </pc:docChgLst>
 </pc:chgInfo>
@@ -765,7 +460,7 @@
           <a:p>
             <a:fld id="{62A68C42-B005-8F46-81B0-B2663E397375}" type="datetimeFigureOut">
               <a:rPr kumimoji="1" lang="ja-JP" altLang="en-US" smtClean="0"/>
-              <a:t>2026/6/12</a:t>
+              <a:t>2026/10/5</a:t>
             </a:fld>
             <a:endParaRPr kumimoji="1" lang="ja-JP" altLang="en-US"/>
           </a:p>
@@ -4972,7 +4667,7 @@
             <a:fld id="{18D69C22-D09C-4C49-8D1D-97250173694B}" type="datetimeFigureOut">
               <a:rPr kumimoji="1" lang="ja-JP" altLang="en-US" smtClean="0"/>
               <a:pPr/>
-              <a:t>2026/6/12</a:t>
+              <a:t>2026/10/5</a:t>
             </a:fld>
             <a:endParaRPr kumimoji="1" lang="ja-JP" altLang="en-US"/>
           </a:p>
@@ -6523,10 +6218,10 @@
       </p:sp>
       <p:pic>
         <p:nvPicPr>
-          <p:cNvPr id="5" name="グラフィックス 4">
-            <a:extLst>
-              <a:ext uri="{FF2B5EF4-FFF2-40B4-BE49-F238E27FC236}">
-                <a16:creationId xmlns:a16="http://schemas.microsoft.com/office/drawing/2014/main" id="{B3880868-382E-4AC9-32F7-F28691D35BEA}"/>
+          <p:cNvPr id="6" name="グラフィックス 5">
+            <a:extLst>
+              <a:ext uri="{FF2B5EF4-FFF2-40B4-BE49-F238E27FC236}">
+                <a16:creationId xmlns:a16="http://schemas.microsoft.com/office/drawing/2014/main" id="{97A09EAD-F0F0-5E7F-5DF7-7BA0A63C6513}"/>
               </a:ext>
             </a:extLst>
           </p:cNvPr>
@@ -6549,7 +6244,7 @@
         </p:blipFill>
         <p:spPr>
           <a:xfrm>
-            <a:off x="11469881" y="7383083"/>
+            <a:off x="11468974" y="7403017"/>
             <a:ext cx="1440000" cy="1440000"/>
           </a:xfrm>
           <a:prstGeom prst="rect">
@@ -6559,10 +6254,10 @@
       </p:pic>
       <p:pic>
         <p:nvPicPr>
-          <p:cNvPr id="6" name="グラフィックス 5">
-            <a:extLst>
-              <a:ext uri="{FF2B5EF4-FFF2-40B4-BE49-F238E27FC236}">
-                <a16:creationId xmlns:a16="http://schemas.microsoft.com/office/drawing/2014/main" id="{97A09EAD-F0F0-5E7F-5DF7-7BA0A63C6513}"/>
+          <p:cNvPr id="7" name="グラフィックス 6">
+            <a:extLst>
+              <a:ext uri="{FF2B5EF4-FFF2-40B4-BE49-F238E27FC236}">
+                <a16:creationId xmlns:a16="http://schemas.microsoft.com/office/drawing/2014/main" id="{7DC96729-01FD-BCD1-73B7-1C1CC2007A08}"/>
               </a:ext>
             </a:extLst>
           </p:cNvPr>
@@ -6585,7 +6280,7 @@
         </p:blipFill>
         <p:spPr>
           <a:xfrm>
-            <a:off x="14348068" y="7383083"/>
+            <a:off x="15072529" y="7403018"/>
             <a:ext cx="1440000" cy="1440000"/>
           </a:xfrm>
           <a:prstGeom prst="rect">
@@ -6595,10 +6290,10 @@
       </p:pic>
       <p:pic>
         <p:nvPicPr>
-          <p:cNvPr id="7" name="グラフィックス 6">
-            <a:extLst>
-              <a:ext uri="{FF2B5EF4-FFF2-40B4-BE49-F238E27FC236}">
-                <a16:creationId xmlns:a16="http://schemas.microsoft.com/office/drawing/2014/main" id="{7DC96729-01FD-BCD1-73B7-1C1CC2007A08}"/>
+          <p:cNvPr id="12" name="グラフィックス 11">
+            <a:extLst>
+              <a:ext uri="{FF2B5EF4-FFF2-40B4-BE49-F238E27FC236}">
+                <a16:creationId xmlns:a16="http://schemas.microsoft.com/office/drawing/2014/main" id="{74D7D497-DB02-09C1-824E-33957D2BCD84}"/>
               </a:ext>
             </a:extLst>
           </p:cNvPr>
@@ -6621,196 +6316,6 @@
         </p:blipFill>
         <p:spPr>
           <a:xfrm>
-            <a:off x="14348068" y="10229281"/>
-            <a:ext cx="1440000" cy="1440000"/>
-          </a:xfrm>
-          <a:prstGeom prst="rect">
-            <a:avLst/>
-          </a:prstGeom>
-        </p:spPr>
-      </p:pic>
-      <p:pic>
-        <p:nvPicPr>
-          <p:cNvPr id="8" name="グラフィックス 7">
-            <a:extLst>
-              <a:ext uri="{FF2B5EF4-FFF2-40B4-BE49-F238E27FC236}">
-                <a16:creationId xmlns:a16="http://schemas.microsoft.com/office/drawing/2014/main" id="{E522FE0C-DF3D-F075-D0D5-84352E243FA7}"/>
-              </a:ext>
-            </a:extLst>
-          </p:cNvPr>
-          <p:cNvPicPr>
-            <a:picLocks noChangeAspect="1"/>
-          </p:cNvPicPr>
-          <p:nvPr/>
-        </p:nvPicPr>
-        <p:blipFill>
-          <a:blip>
-            <a:extLst>
-              <a:ext uri="{96DAC541-7B7A-43D3-8B79-37D633B846F1}">
-                <asvg:svgBlip xmlns:asvg="http://schemas.microsoft.com/office/drawing/2016/SVG/main" r:embed="rId5"/>
-              </a:ext>
-            </a:extLst>
-          </a:blip>
-          <a:stretch>
-            <a:fillRect/>
-          </a:stretch>
-        </p:blipFill>
-        <p:spPr>
-          <a:xfrm>
-            <a:off x="11469881" y="1690687"/>
-            <a:ext cx="1440000" cy="1440000"/>
-          </a:xfrm>
-          <a:prstGeom prst="rect">
-            <a:avLst/>
-          </a:prstGeom>
-        </p:spPr>
-      </p:pic>
-      <p:pic>
-        <p:nvPicPr>
-          <p:cNvPr id="9" name="グラフィックス 8">
-            <a:extLst>
-              <a:ext uri="{FF2B5EF4-FFF2-40B4-BE49-F238E27FC236}">
-                <a16:creationId xmlns:a16="http://schemas.microsoft.com/office/drawing/2014/main" id="{A940BD57-6C7C-5A30-87EB-EE85A1DBB8C0}"/>
-              </a:ext>
-            </a:extLst>
-          </p:cNvPr>
-          <p:cNvPicPr>
-            <a:picLocks noChangeAspect="1"/>
-          </p:cNvPicPr>
-          <p:nvPr/>
-        </p:nvPicPr>
-        <p:blipFill>
-          <a:blip>
-            <a:extLst>
-              <a:ext uri="{96DAC541-7B7A-43D3-8B79-37D633B846F1}">
-                <asvg:svgBlip xmlns:asvg="http://schemas.microsoft.com/office/drawing/2016/SVG/main" r:embed="rId6"/>
-              </a:ext>
-            </a:extLst>
-          </a:blip>
-          <a:stretch>
-            <a:fillRect/>
-          </a:stretch>
-        </p:blipFill>
-        <p:spPr>
-          <a:xfrm>
-            <a:off x="7149882" y="4176885"/>
-            <a:ext cx="2160000" cy="2160000"/>
-          </a:xfrm>
-          <a:prstGeom prst="rect">
-            <a:avLst/>
-          </a:prstGeom>
-        </p:spPr>
-      </p:pic>
-      <p:cxnSp>
-        <p:nvCxnSpPr>
-          <p:cNvPr id="10" name="コネクタ: カギ線 9">
-            <a:extLst>
-              <a:ext uri="{FF2B5EF4-FFF2-40B4-BE49-F238E27FC236}">
-                <a16:creationId xmlns:a16="http://schemas.microsoft.com/office/drawing/2014/main" id="{51A3008E-6A9F-5086-F63A-863795834288}"/>
-              </a:ext>
-            </a:extLst>
-          </p:cNvPr>
-          <p:cNvCxnSpPr>
-            <a:cxnSpLocks/>
-            <a:stCxn id="7" idx="1"/>
-            <a:endCxn id="5" idx="3"/>
-          </p:cNvCxnSpPr>
-          <p:nvPr/>
-        </p:nvCxnSpPr>
-        <p:spPr>
-          <a:xfrm rot="10800000">
-            <a:off x="12909882" y="8103083"/>
-            <a:ext cx="1438187" cy="2846198"/>
-          </a:xfrm>
-          <a:prstGeom prst="bentConnector3">
-            <a:avLst/>
-          </a:prstGeom>
-          <a:ln w="76200">
-            <a:solidFill>
-              <a:schemeClr val="bg2"/>
-            </a:solidFill>
-            <a:tailEnd type="triangle"/>
-          </a:ln>
-        </p:spPr>
-        <p:style>
-          <a:lnRef idx="1">
-            <a:schemeClr val="accent1"/>
-          </a:lnRef>
-          <a:fillRef idx="0">
-            <a:schemeClr val="accent1"/>
-          </a:fillRef>
-          <a:effectRef idx="0">
-            <a:schemeClr val="accent1"/>
-          </a:effectRef>
-          <a:fontRef idx="minor">
-            <a:schemeClr val="tx1"/>
-          </a:fontRef>
-        </p:style>
-      </p:cxnSp>
-      <p:pic>
-        <p:nvPicPr>
-          <p:cNvPr id="11" name="グラフィックス 10">
-            <a:extLst>
-              <a:ext uri="{FF2B5EF4-FFF2-40B4-BE49-F238E27FC236}">
-                <a16:creationId xmlns:a16="http://schemas.microsoft.com/office/drawing/2014/main" id="{1C49E6CD-EF0B-AC43-5FA8-4EDA20221E18}"/>
-              </a:ext>
-            </a:extLst>
-          </p:cNvPr>
-          <p:cNvPicPr>
-            <a:picLocks noChangeAspect="1"/>
-          </p:cNvPicPr>
-          <p:nvPr/>
-        </p:nvPicPr>
-        <p:blipFill>
-          <a:blip>
-            <a:extLst>
-              <a:ext uri="{96DAC541-7B7A-43D3-8B79-37D633B846F1}">
-                <asvg:svgBlip xmlns:asvg="http://schemas.microsoft.com/office/drawing/2016/SVG/main" r:embed="rId7"/>
-              </a:ext>
-            </a:extLst>
-          </a:blip>
-          <a:stretch>
-            <a:fillRect/>
-          </a:stretch>
-        </p:blipFill>
-        <p:spPr>
-          <a:xfrm>
-            <a:off x="11469881" y="10229281"/>
-            <a:ext cx="1440000" cy="1440000"/>
-          </a:xfrm>
-          <a:prstGeom prst="rect">
-            <a:avLst/>
-          </a:prstGeom>
-        </p:spPr>
-      </p:pic>
-      <p:pic>
-        <p:nvPicPr>
-          <p:cNvPr id="12" name="グラフィックス 11">
-            <a:extLst>
-              <a:ext uri="{FF2B5EF4-FFF2-40B4-BE49-F238E27FC236}">
-                <a16:creationId xmlns:a16="http://schemas.microsoft.com/office/drawing/2014/main" id="{74D7D497-DB02-09C1-824E-33957D2BCD84}"/>
-              </a:ext>
-            </a:extLst>
-          </p:cNvPr>
-          <p:cNvPicPr>
-            <a:picLocks noChangeAspect="1"/>
-          </p:cNvPicPr>
-          <p:nvPr/>
-        </p:nvPicPr>
-        <p:blipFill>
-          <a:blip>
-            <a:extLst>
-              <a:ext uri="{96DAC541-7B7A-43D3-8B79-37D633B846F1}">
-                <asvg:svgBlip xmlns:asvg="http://schemas.microsoft.com/office/drawing/2016/SVG/main" r:embed="rId8"/>
-              </a:ext>
-            </a:extLst>
-          </a:blip>
-          <a:stretch>
-            <a:fillRect/>
-          </a:stretch>
-        </p:blipFill>
-        <p:spPr>
-          <a:xfrm>
             <a:off x="11469881" y="4536885"/>
             <a:ext cx="1440000" cy="1440000"/>
           </a:xfrm>
@@ -6830,109 +6335,15 @@
           </p:cNvPr>
           <p:cNvCxnSpPr>
             <a:cxnSpLocks/>
-            <a:stCxn id="5" idx="1"/>
-            <a:endCxn id="9" idx="3"/>
+            <a:stCxn id="6" idx="1"/>
+            <a:endCxn id="40" idx="3"/>
           </p:cNvCxnSpPr>
           <p:nvPr/>
         </p:nvCxnSpPr>
         <p:spPr>
           <a:xfrm rot="10800000">
-            <a:off x="9309883" y="5256885"/>
-            <a:ext cx="2159999" cy="2846198"/>
-          </a:xfrm>
-          <a:prstGeom prst="bentConnector3">
-            <a:avLst/>
-          </a:prstGeom>
-          <a:ln w="76200">
-            <a:solidFill>
-              <a:schemeClr val="bg2"/>
-            </a:solidFill>
-            <a:headEnd type="triangle" w="med" len="med"/>
-            <a:tailEnd type="triangle" w="med" len="med"/>
-          </a:ln>
-        </p:spPr>
-        <p:style>
-          <a:lnRef idx="1">
-            <a:schemeClr val="accent1"/>
-          </a:lnRef>
-          <a:fillRef idx="0">
-            <a:schemeClr val="accent1"/>
-          </a:fillRef>
-          <a:effectRef idx="0">
-            <a:schemeClr val="accent1"/>
-          </a:effectRef>
-          <a:fontRef idx="minor">
-            <a:schemeClr val="tx1"/>
-          </a:fontRef>
-        </p:style>
-      </p:cxnSp>
-      <p:cxnSp>
-        <p:nvCxnSpPr>
-          <p:cNvPr id="14" name="直線矢印コネクタ 13">
-            <a:extLst>
-              <a:ext uri="{FF2B5EF4-FFF2-40B4-BE49-F238E27FC236}">
-                <a16:creationId xmlns:a16="http://schemas.microsoft.com/office/drawing/2014/main" id="{5665F72F-0E9C-93A9-29FB-1BC3EF398E73}"/>
-              </a:ext>
-            </a:extLst>
-          </p:cNvPr>
-          <p:cNvCxnSpPr>
-            <a:cxnSpLocks/>
-            <a:stCxn id="6" idx="1"/>
-            <a:endCxn id="5" idx="3"/>
-          </p:cNvCxnSpPr>
-          <p:nvPr/>
-        </p:nvCxnSpPr>
-        <p:spPr>
-          <a:xfrm flipH="1">
-            <a:off x="12909881" y="8103083"/>
-            <a:ext cx="1438187" cy="0"/>
-          </a:xfrm>
-          <a:prstGeom prst="straightConnector1">
-            <a:avLst/>
-          </a:prstGeom>
-          <a:ln w="76200">
-            <a:solidFill>
-              <a:schemeClr val="bg2"/>
-            </a:solidFill>
-            <a:headEnd type="triangle" w="med" len="med"/>
-            <a:tailEnd type="triangle" w="med" len="med"/>
-          </a:ln>
-        </p:spPr>
-        <p:style>
-          <a:lnRef idx="1">
-            <a:schemeClr val="accent1"/>
-          </a:lnRef>
-          <a:fillRef idx="0">
-            <a:schemeClr val="accent1"/>
-          </a:fillRef>
-          <a:effectRef idx="0">
-            <a:schemeClr val="accent1"/>
-          </a:effectRef>
-          <a:fontRef idx="minor">
-            <a:schemeClr val="tx1"/>
-          </a:fontRef>
-        </p:style>
-      </p:cxnSp>
-      <p:cxnSp>
-        <p:nvCxnSpPr>
-          <p:cNvPr id="15" name="コネクタ: カギ線 14">
-            <a:extLst>
-              <a:ext uri="{FF2B5EF4-FFF2-40B4-BE49-F238E27FC236}">
-                <a16:creationId xmlns:a16="http://schemas.microsoft.com/office/drawing/2014/main" id="{C5B81EFA-4947-66CF-F891-8299F25410FA}"/>
-              </a:ext>
-            </a:extLst>
-          </p:cNvPr>
-          <p:cNvCxnSpPr>
-            <a:cxnSpLocks/>
-            <a:stCxn id="8" idx="1"/>
-            <a:endCxn id="9" idx="3"/>
-          </p:cNvCxnSpPr>
-          <p:nvPr/>
-        </p:nvCxnSpPr>
-        <p:spPr>
-          <a:xfrm rot="10800000" flipV="1">
-            <a:off x="9309883" y="2410687"/>
-            <a:ext cx="2159999" cy="2846198"/>
+            <a:off x="9308978" y="5256885"/>
+            <a:ext cx="2159996" cy="2866132"/>
           </a:xfrm>
           <a:prstGeom prst="bentConnector3">
             <a:avLst>
@@ -6974,14 +6385,14 @@
           <p:cNvCxnSpPr>
             <a:cxnSpLocks/>
             <a:stCxn id="12" idx="1"/>
-            <a:endCxn id="9" idx="3"/>
+            <a:endCxn id="40" idx="3"/>
           </p:cNvCxnSpPr>
           <p:nvPr/>
         </p:nvCxnSpPr>
         <p:spPr>
           <a:xfrm flipH="1">
-            <a:off x="9309882" y="5256885"/>
-            <a:ext cx="2159999" cy="0"/>
+            <a:off x="9308978" y="5256885"/>
+            <a:ext cx="2160903" cy="0"/>
           </a:xfrm>
           <a:prstGeom prst="straightConnector1">
             <a:avLst/>
@@ -7011,10 +6422,10 @@
       </p:cxnSp>
       <p:sp>
         <p:nvSpPr>
-          <p:cNvPr id="17" name="テキスト ボックス 16">
-            <a:extLst>
-              <a:ext uri="{FF2B5EF4-FFF2-40B4-BE49-F238E27FC236}">
-                <a16:creationId xmlns:a16="http://schemas.microsoft.com/office/drawing/2014/main" id="{2E87E127-501D-495F-6FC0-34B4F7E95A68}"/>
+          <p:cNvPr id="18" name="テキスト ボックス 17">
+            <a:extLst>
+              <a:ext uri="{FF2B5EF4-FFF2-40B4-BE49-F238E27FC236}">
+                <a16:creationId xmlns:a16="http://schemas.microsoft.com/office/drawing/2014/main" id="{08AD9044-79AA-2BF3-A59C-139D0BB2000A}"/>
               </a:ext>
             </a:extLst>
           </p:cNvPr>
@@ -7023,50 +6434,7 @@
         </p:nvSpPr>
         <p:spPr>
           <a:xfrm>
-            <a:off x="11109881" y="3098776"/>
-            <a:ext cx="2160000" cy="646331"/>
-          </a:xfrm>
-          <a:prstGeom prst="rect">
-            <a:avLst/>
-          </a:prstGeom>
-          <a:noFill/>
-        </p:spPr>
-        <p:txBody>
-          <a:bodyPr wrap="square" rtlCol="0">
-            <a:spAutoFit/>
-          </a:bodyPr>
-          <a:lstStyle/>
-          <a:p>
-            <a:pPr algn="ctr"/>
-            <a:r>
-              <a:rPr kumimoji="1" lang="ja-JP" altLang="en-US" dirty="0"/>
-              <a:t>さくらの</a:t>
-            </a:r>
-            <a:br>
-              <a:rPr kumimoji="1" lang="en-US" altLang="ja-JP" dirty="0"/>
-            </a:br>
-            <a:r>
-              <a:rPr kumimoji="1" lang="ja-JP" altLang="en-US" dirty="0"/>
-              <a:t>レンタルサーバ</a:t>
-            </a:r>
-          </a:p>
-        </p:txBody>
-      </p:sp>
-      <p:sp>
-        <p:nvSpPr>
-          <p:cNvPr id="18" name="テキスト ボックス 17">
-            <a:extLst>
-              <a:ext uri="{FF2B5EF4-FFF2-40B4-BE49-F238E27FC236}">
-                <a16:creationId xmlns:a16="http://schemas.microsoft.com/office/drawing/2014/main" id="{08AD9044-79AA-2BF3-A59C-139D0BB2000A}"/>
-              </a:ext>
-            </a:extLst>
-          </p:cNvPr>
-          <p:cNvSpPr txBox="1"/>
-          <p:nvPr/>
-        </p:nvSpPr>
-        <p:spPr>
-          <a:xfrm>
-            <a:off x="12189881" y="5996819"/>
+            <a:off x="11109881" y="3870621"/>
             <a:ext cx="2160000" cy="646331"/>
           </a:xfrm>
           <a:prstGeom prst="rect">
@@ -7106,7 +6474,6 @@
           </p:cNvPr>
           <p:cNvCxnSpPr>
             <a:cxnSpLocks/>
-            <a:stCxn id="5" idx="0"/>
             <a:endCxn id="12" idx="2"/>
           </p:cNvCxnSpPr>
           <p:nvPr/>
@@ -7144,10 +6511,10 @@
       </p:cxnSp>
       <p:sp>
         <p:nvSpPr>
-          <p:cNvPr id="20" name="テキスト ボックス 19">
-            <a:extLst>
-              <a:ext uri="{FF2B5EF4-FFF2-40B4-BE49-F238E27FC236}">
-                <a16:creationId xmlns:a16="http://schemas.microsoft.com/office/drawing/2014/main" id="{F04A8B08-D24B-99DB-FEEB-E5098440177B}"/>
+          <p:cNvPr id="22" name="テキスト ボックス 21">
+            <a:extLst>
+              <a:ext uri="{FF2B5EF4-FFF2-40B4-BE49-F238E27FC236}">
+                <a16:creationId xmlns:a16="http://schemas.microsoft.com/office/drawing/2014/main" id="{5122F321-7C0D-8ED7-4C52-DBDFCA3C5BC0}"/>
               </a:ext>
             </a:extLst>
           </p:cNvPr>
@@ -7156,90 +6523,7 @@
         </p:nvSpPr>
         <p:spPr>
           <a:xfrm>
-            <a:off x="10023608" y="8813752"/>
-            <a:ext cx="2160000" cy="369332"/>
-          </a:xfrm>
-          <a:prstGeom prst="rect">
-            <a:avLst/>
-          </a:prstGeom>
-          <a:noFill/>
-        </p:spPr>
-        <p:txBody>
-          <a:bodyPr wrap="square" rtlCol="0">
-            <a:spAutoFit/>
-          </a:bodyPr>
-          <a:lstStyle/>
-          <a:p>
-            <a:pPr algn="ctr"/>
-            <a:r>
-              <a:rPr kumimoji="1" lang="en-US" altLang="ja-JP" dirty="0" err="1"/>
-              <a:t>AppRun</a:t>
-            </a:r>
-            <a:r>
-              <a:rPr kumimoji="1" lang="ja-JP" altLang="en-US" dirty="0"/>
-              <a:t>共用型</a:t>
-            </a:r>
-          </a:p>
-        </p:txBody>
-      </p:sp>
-      <p:sp>
-        <p:nvSpPr>
-          <p:cNvPr id="21" name="テキスト ボックス 20">
-            <a:extLst>
-              <a:ext uri="{FF2B5EF4-FFF2-40B4-BE49-F238E27FC236}">
-                <a16:creationId xmlns:a16="http://schemas.microsoft.com/office/drawing/2014/main" id="{4BDE2633-1D8E-EEA2-C61D-06E780C19E46}"/>
-              </a:ext>
-            </a:extLst>
-          </p:cNvPr>
-          <p:cNvSpPr txBox="1"/>
-          <p:nvPr/>
-        </p:nvSpPr>
-        <p:spPr>
-          <a:xfrm>
-            <a:off x="11109881" y="11669281"/>
-            <a:ext cx="2160000" cy="646331"/>
-          </a:xfrm>
-          <a:prstGeom prst="rect">
-            <a:avLst/>
-          </a:prstGeom>
-          <a:noFill/>
-        </p:spPr>
-        <p:txBody>
-          <a:bodyPr wrap="square" rtlCol="0">
-            <a:spAutoFit/>
-          </a:bodyPr>
-          <a:lstStyle/>
-          <a:p>
-            <a:pPr algn="ctr"/>
-            <a:r>
-              <a:rPr kumimoji="1" lang="ja-JP" altLang="en-US" dirty="0"/>
-              <a:t>モニタリング</a:t>
-            </a:r>
-            <a:br>
-              <a:rPr kumimoji="1" lang="en-US" altLang="ja-JP" dirty="0"/>
-            </a:br>
-            <a:r>
-              <a:rPr kumimoji="1" lang="ja-JP" altLang="en-US" dirty="0"/>
-              <a:t>スイート</a:t>
-            </a:r>
-          </a:p>
-        </p:txBody>
-      </p:sp>
-      <p:sp>
-        <p:nvSpPr>
-          <p:cNvPr id="22" name="テキスト ボックス 21">
-            <a:extLst>
-              <a:ext uri="{FF2B5EF4-FFF2-40B4-BE49-F238E27FC236}">
-                <a16:creationId xmlns:a16="http://schemas.microsoft.com/office/drawing/2014/main" id="{5122F321-7C0D-8ED7-4C52-DBDFCA3C5BC0}"/>
-              </a:ext>
-            </a:extLst>
-          </p:cNvPr>
-          <p:cNvSpPr txBox="1"/>
-          <p:nvPr/>
-        </p:nvSpPr>
-        <p:spPr>
-          <a:xfrm>
-            <a:off x="13988068" y="11669281"/>
+            <a:off x="14712529" y="8889183"/>
             <a:ext cx="2160000" cy="646331"/>
           </a:xfrm>
           <a:prstGeom prst="rect">
@@ -7282,7 +6566,7 @@
         </p:nvSpPr>
         <p:spPr>
           <a:xfrm>
-            <a:off x="15072529" y="8817476"/>
+            <a:off x="11108974" y="8843017"/>
             <a:ext cx="2160000" cy="369332"/>
           </a:xfrm>
           <a:prstGeom prst="rect">
@@ -7320,15 +6604,15 @@
           </p:cNvPr>
           <p:cNvCxnSpPr>
             <a:cxnSpLocks/>
-            <a:stCxn id="7" idx="0"/>
-            <a:endCxn id="6" idx="2"/>
+            <a:stCxn id="7" idx="1"/>
+            <a:endCxn id="6" idx="3"/>
           </p:cNvCxnSpPr>
           <p:nvPr/>
         </p:nvCxnSpPr>
         <p:spPr>
-          <a:xfrm flipV="1">
-            <a:off x="15068068" y="8823083"/>
-            <a:ext cx="0" cy="1406198"/>
+          <a:xfrm flipH="1" flipV="1">
+            <a:off x="12908974" y="8123017"/>
+            <a:ext cx="2163555" cy="1"/>
           </a:xfrm>
           <a:prstGeom prst="straightConnector1">
             <a:avLst/>
@@ -7355,97 +6639,42 @@
           </a:fontRef>
         </p:style>
       </p:cxnSp>
-      <p:cxnSp>
-        <p:nvCxnSpPr>
-          <p:cNvPr id="25" name="直線矢印コネクタ 24">
-            <a:extLst>
-              <a:ext uri="{FF2B5EF4-FFF2-40B4-BE49-F238E27FC236}">
-                <a16:creationId xmlns:a16="http://schemas.microsoft.com/office/drawing/2014/main" id="{EB44ECEB-367D-086D-8E15-97D80659D6AB}"/>
-              </a:ext>
-            </a:extLst>
-          </p:cNvPr>
-          <p:cNvCxnSpPr>
-            <a:cxnSpLocks/>
-            <a:stCxn id="5" idx="2"/>
-            <a:endCxn id="11" idx="0"/>
-          </p:cNvCxnSpPr>
+      <p:pic>
+        <p:nvPicPr>
+          <p:cNvPr id="40" name="グラフィックス 39">
+            <a:extLst>
+              <a:ext uri="{FF2B5EF4-FFF2-40B4-BE49-F238E27FC236}">
+                <a16:creationId xmlns:a16="http://schemas.microsoft.com/office/drawing/2014/main" id="{53108FBA-FC4B-7EBA-BD31-16AEFDC0B322}"/>
+              </a:ext>
+            </a:extLst>
+          </p:cNvPr>
+          <p:cNvPicPr>
+            <a:picLocks noChangeAspect="1"/>
+          </p:cNvPicPr>
           <p:nvPr/>
-        </p:nvCxnSpPr>
-        <p:spPr>
-          <a:xfrm>
-            <a:off x="12189881" y="8823083"/>
-            <a:ext cx="0" cy="1406198"/>
-          </a:xfrm>
-          <a:prstGeom prst="straightConnector1">
+        </p:nvPicPr>
+        <p:blipFill>
+          <a:blip>
+            <a:extLst>
+              <a:ext uri="{96DAC541-7B7A-43D3-8B79-37D633B846F1}">
+                <asvg:svgBlip xmlns:asvg="http://schemas.microsoft.com/office/drawing/2016/SVG/main" r:embed="rId5"/>
+              </a:ext>
+            </a:extLst>
+          </a:blip>
+          <a:stretch>
+            <a:fillRect/>
+          </a:stretch>
+        </p:blipFill>
+        <p:spPr>
+          <a:xfrm>
+            <a:off x="7868978" y="4536885"/>
+            <a:ext cx="1440000" cy="1440000"/>
+          </a:xfrm>
+          <a:prstGeom prst="rect">
             <a:avLst/>
           </a:prstGeom>
-          <a:ln w="76200">
-            <a:solidFill>
-              <a:schemeClr val="bg2"/>
-            </a:solidFill>
-            <a:tailEnd type="triangle"/>
-          </a:ln>
-        </p:spPr>
-        <p:style>
-          <a:lnRef idx="1">
-            <a:schemeClr val="accent1"/>
-          </a:lnRef>
-          <a:fillRef idx="0">
-            <a:schemeClr val="accent1"/>
-          </a:fillRef>
-          <a:effectRef idx="0">
-            <a:schemeClr val="accent1"/>
-          </a:effectRef>
-          <a:fontRef idx="minor">
-            <a:schemeClr val="tx1"/>
-          </a:fontRef>
-        </p:style>
-      </p:cxnSp>
-      <p:cxnSp>
-        <p:nvCxnSpPr>
-          <p:cNvPr id="27" name="コネクタ: カギ線 26">
-            <a:extLst>
-              <a:ext uri="{FF2B5EF4-FFF2-40B4-BE49-F238E27FC236}">
-                <a16:creationId xmlns:a16="http://schemas.microsoft.com/office/drawing/2014/main" id="{16338569-8FAB-7CA5-AE13-4256CAF8AB42}"/>
-              </a:ext>
-            </a:extLst>
-          </p:cNvPr>
-          <p:cNvCxnSpPr>
-            <a:stCxn id="6" idx="0"/>
-          </p:cNvCxnSpPr>
-          <p:nvPr/>
-        </p:nvCxnSpPr>
-        <p:spPr>
-          <a:xfrm rot="16200000" flipV="1">
-            <a:off x="12925876" y="5240890"/>
-            <a:ext cx="2126198" cy="2158187"/>
-          </a:xfrm>
-          <a:prstGeom prst="bentConnector2">
-            <a:avLst/>
-          </a:prstGeom>
-          <a:ln w="76200">
-            <a:solidFill>
-              <a:schemeClr val="bg2"/>
-            </a:solidFill>
-            <a:headEnd type="triangle" w="med" len="med"/>
-            <a:tailEnd type="triangle" w="med" len="med"/>
-          </a:ln>
-        </p:spPr>
-        <p:style>
-          <a:lnRef idx="1">
-            <a:schemeClr val="accent1"/>
-          </a:lnRef>
-          <a:fillRef idx="0">
-            <a:schemeClr val="accent1"/>
-          </a:fillRef>
-          <a:effectRef idx="0">
-            <a:schemeClr val="accent1"/>
-          </a:effectRef>
-          <a:fontRef idx="minor">
-            <a:schemeClr val="tx1"/>
-          </a:fontRef>
-        </p:style>
-      </p:cxnSp>
+        </p:spPr>
+      </p:pic>
     </p:spTree>
     <p:extLst>
       <p:ext uri="{BB962C8B-B14F-4D97-AF65-F5344CB8AC3E}">
